--- a/cursos/recursos/partidas-modelo/11-partida-11.pptx
+++ b/cursos/recursos/partidas-modelo/11-partida-11.pptx
@@ -3219,7 +3219,7 @@
                 </a:solidFill>
                 <a:latin typeface="Calibri"/>
               </a:rPr>
-              <a:t>J. Timman – J. Polgar, Torneo Sigeman &amp; Co, Malmö 2000 · Defensa India de Dama, 4 g3 Ba6</a:t>
+              <a:t>J. Timman – J. Polgar, Torneo Sigeman &amp; Co, Malmö 2000 · Defensa India de Dama, 4 g3 Aa6</a:t>
             </a:r>
           </a:p>
         </p:txBody>

--- a/cursos/recursos/partidas-modelo/11-partida-11.pptx
+++ b/cursos/recursos/partidas-modelo/11-partida-11.pptx
@@ -3537,7 +3537,7 @@
                 </a:solidFill>
                 <a:latin typeface="Calibri"/>
               </a:rPr>
-              <a:t>Recorré la partida con los comentarios, adivinás las jugadas clave y después jugá la posición crítica contra el motor con el bando ganador.</a:t>
+              <a:t>Recorre la partida con los comentarios, adivinas las jugadas clave y después juega la posición crítica contra el motor con el bando ganador.</a:t>
             </a:r>
           </a:p>
           <a:p>
@@ -3569,7 +3569,7 @@
                 </a:solidFill>
                 <a:latin typeface="Calibri"/>
               </a:rPr>
-              <a:t>En la página del curso podés recorrer cada partida con los comentarios, adivinar las jugadas clave en el tablero y continuar cualquier posición contra el motor (Stockfish). La hoja de ejercicios en PDF reúne los momentos clave de esta lección para resolver sin tablero.</a:t>
+              <a:t>En la página del curso puedes recorrer cada partida con los comentarios, adivinar las jugadas clave en el tablero y continuar cualquier posición contra el motor (Stockfish). La hoja de ejercicios en PDF reúne los momentos clave de esta lección para resolver sin tablero.</a:t>
             </a:r>
           </a:p>
         </p:txBody>
@@ -3608,7 +3608,7 @@
                 </a:solidFill>
                 <a:latin typeface="Calibri"/>
               </a:rPr>
-              <a:t>•  Primero recorré la partida completa leyendo los comentarios.</a:t>
+              <a:t>•  Primero recorre la partida completa leyendo los comentarios.</a:t>
             </a:r>
           </a:p>
           <a:p>
@@ -3624,7 +3624,7 @@
                 </a:solidFill>
                 <a:latin typeface="Calibri"/>
               </a:rPr>
-              <a:t>•  Después hacé el modo "adivinar las jugadas clave" hasta acertar todas.</a:t>
+              <a:t>•  Después haz el modo "adivinar las jugadas clave" hasta acertar todas.</a:t>
             </a:r>
           </a:p>
           <a:p>
@@ -3640,7 +3640,7 @@
                 </a:solidFill>
                 <a:latin typeface="Calibri"/>
               </a:rPr>
-              <a:t>•  Por último respondé el cuestionario y anotá con tus palabras las reglas de la lección.</a:t>
+              <a:t>•  Por último responde el cuestionario y anota con tus palabras las reglas de la lección.</a:t>
             </a:r>
           </a:p>
         </p:txBody>

--- a/cursos/recursos/partidas-modelo/11-partida-11.pptx
+++ b/cursos/recursos/partidas-modelo/11-partida-11.pptx
@@ -3219,7 +3219,7 @@
                 </a:solidFill>
                 <a:latin typeface="Calibri"/>
               </a:rPr>
-              <a:t>J. Timman – J. Polgar, Torneo Sigeman &amp; Co, Malmö 2000 · Defensa India de Dama, 4 g3 Ba6</a:t>
+              <a:t>J. Timman – J. Polgar, Torneo Sigeman &amp; Co, Malmö 2000 · Defensa India de Dama, 4 g3 Aa6</a:t>
             </a:r>
           </a:p>
         </p:txBody>
@@ -3537,7 +3537,7 @@
                 </a:solidFill>
                 <a:latin typeface="Calibri"/>
               </a:rPr>
-              <a:t>Recorré la partida con los comentarios, adivinás las jugadas clave y después jugá la posición crítica contra el motor con el bando ganador.</a:t>
+              <a:t>Recorre la partida con los comentarios, adivinas las jugadas clave y después juega la posición crítica contra el motor con el bando ganador.</a:t>
             </a:r>
           </a:p>
           <a:p>
@@ -3569,7 +3569,7 @@
                 </a:solidFill>
                 <a:latin typeface="Calibri"/>
               </a:rPr>
-              <a:t>En la página del curso podés recorrer cada partida con los comentarios, adivinar las jugadas clave en el tablero y continuar cualquier posición contra el motor (Stockfish). La hoja de ejercicios en PDF reúne los momentos clave de esta lección para resolver sin tablero.</a:t>
+              <a:t>En la página del curso puedes recorrer cada partida con los comentarios, adivinar las jugadas clave en el tablero y continuar cualquier posición contra el motor (Stockfish). La hoja de ejercicios en PDF reúne los momentos clave de esta lección para resolver sin tablero.</a:t>
             </a:r>
           </a:p>
         </p:txBody>
@@ -3608,7 +3608,7 @@
                 </a:solidFill>
                 <a:latin typeface="Calibri"/>
               </a:rPr>
-              <a:t>•  Primero recorré la partida completa leyendo los comentarios.</a:t>
+              <a:t>•  Primero recorre la partida completa leyendo los comentarios.</a:t>
             </a:r>
           </a:p>
           <a:p>
@@ -3624,7 +3624,7 @@
                 </a:solidFill>
                 <a:latin typeface="Calibri"/>
               </a:rPr>
-              <a:t>•  Después hacé el modo "adivinar las jugadas clave" hasta acertar todas.</a:t>
+              <a:t>•  Después haz el modo "adivinar las jugadas clave" hasta acertar todas.</a:t>
             </a:r>
           </a:p>
           <a:p>
@@ -3640,7 +3640,7 @@
                 </a:solidFill>
                 <a:latin typeface="Calibri"/>
               </a:rPr>
-              <a:t>•  Por último respondé el cuestionario y anotá con tus palabras las reglas de la lección.</a:t>
+              <a:t>•  Por último responde el cuestionario y anota con tus palabras las reglas de la lección.</a:t>
             </a:r>
           </a:p>
         </p:txBody>
